--- a/management-seminars/week02_project_components.pptx
+++ b/management-seminars/week02_project_components.pptx
@@ -11,6 +11,7 @@
     <p:sldId id="269" r:id="rId20"/>
     <p:sldId id="270" r:id="rId21"/>
     <p:sldId id="271" r:id="rId22"/>
+    <p:sldId id="272" r:id="rId11"/>
   </p:sldIdLst>
   <p:notesMasterIdLst>
     <p:notesMasterId r:id="rId12"/>
@@ -857,6 +858,76 @@
           <a:p>
             <a:r>
               <a:t>Small additions add up; a change log makes the trade-off visible. When deadlines tighten, QA is the first thing cut and the most expensive thing to have skipped. Hard-coded dates and file paths turn next quarter's rerun into a new project.</a:t>
+            </a:r>
+          </a:p>
+        </p:txBody>
+      </p:sp>
+      <p:sp>
+        <p:nvSpPr>
+          <p:cNvPr id="4" name="Slide Number Placeholder 3"/>
+          <p:cNvSpPr>
+            <a:spLocks noGrp="1"/>
+          </p:cNvSpPr>
+          <p:nvPr>
+            <p:ph type="sldNum" idx="5" sz="quarter"/>
+          </p:nvPr>
+        </p:nvSpPr>
+        <p:spPr/>
+      </p:sp>
+    </p:spTree>
+  </p:cSld>
+  <p:clrMapOvr>
+    <a:masterClrMapping/>
+  </p:clrMapOvr>
+</p:notes>
+</file>
+
+<file path=ppt/notesSlides/notesSlide7.xml><?xml version="1.0" encoding="utf-8"?>
+<p:notes xmlns:a="http://schemas.openxmlformats.org/drawingml/2006/main" xmlns:p="http://schemas.openxmlformats.org/presentationml/2006/main" xmlns:r="http://schemas.openxmlformats.org/officeDocument/2006/relationships">
+  <p:cSld>
+    <p:spTree>
+      <p:nvGrpSpPr>
+        <p:cNvPr id="1" name=""/>
+        <p:cNvGrpSpPr/>
+        <p:nvPr/>
+      </p:nvGrpSpPr>
+      <p:grpSpPr>
+        <a:xfrm>
+          <a:off x="0" y="0"/>
+          <a:ext cx="0" cy="0"/>
+          <a:chOff x="0" y="0"/>
+          <a:chExt cx="0" cy="0"/>
+        </a:xfrm>
+      </p:grpSpPr>
+      <p:sp>
+        <p:nvSpPr>
+          <p:cNvPr id="2" name="Slide Image Placeholder 1"/>
+          <p:cNvSpPr>
+            <a:spLocks noGrp="1"/>
+          </p:cNvSpPr>
+          <p:nvPr>
+            <p:ph type="sldImg" idx="2"/>
+          </p:nvPr>
+        </p:nvSpPr>
+        <p:spPr/>
+      </p:sp>
+      <p:sp>
+        <p:nvSpPr>
+          <p:cNvPr id="3" name="Notes Placeholder 2"/>
+          <p:cNvSpPr>
+            <a:spLocks noGrp="1"/>
+          </p:cNvSpPr>
+          <p:nvPr>
+            <p:ph type="body" idx="3" sz="quarter"/>
+          </p:nvPr>
+        </p:nvSpPr>
+        <p:spPr/>
+        <p:txBody>
+          <a:bodyPr/>
+          <a:lstStyle/>
+          <a:p>
+            <a:r>
+              <a:t>Give students a few minutes to write an answer drawn from their own experience and career, then ask two or three to share. Connect their examples back to this seminar's content. In an online section, post the same question to the discussion board.</a:t>
             </a:r>
           </a:p>
         </p:txBody>
@@ -1506,7 +1577,7 @@
 </p:sldMaster>
 </file>
 
-<file path=ppt/slides/slide11.xml><?xml version="1.0" encoding="utf-8"?>
+<file path=ppt/slides/slide1.xml><?xml version="1.0" encoding="utf-8"?>
 <p:sld xmlns:a="http://schemas.openxmlformats.org/drawingml/2006/main" xmlns:p="http://schemas.openxmlformats.org/presentationml/2006/main" xmlns:r="http://schemas.openxmlformats.org/officeDocument/2006/relationships">
   <p:cSld>
     <p:spTree>
@@ -1600,7 +1671,7 @@
 </p:sld>
 </file>
 
-<file path=ppt/slides/slide12.xml><?xml version="1.0" encoding="utf-8"?>
+<file path=ppt/slides/slide2.xml><?xml version="1.0" encoding="utf-8"?>
 <p:sld xmlns:a="http://schemas.openxmlformats.org/drawingml/2006/main" xmlns:p="http://schemas.openxmlformats.org/presentationml/2006/main" xmlns:r="http://schemas.openxmlformats.org/officeDocument/2006/relationships">
   <p:cSld>
     <p:spTree>
@@ -1797,7 +1868,7 @@
 </p:sld>
 </file>
 
-<file path=ppt/slides/slide13.xml><?xml version="1.0" encoding="utf-8"?>
+<file path=ppt/slides/slide3.xml><?xml version="1.0" encoding="utf-8"?>
 <p:sld xmlns:a="http://schemas.openxmlformats.org/drawingml/2006/main" xmlns:p="http://schemas.openxmlformats.org/presentationml/2006/main" xmlns:r="http://schemas.openxmlformats.org/officeDocument/2006/relationships">
   <p:cSld>
     <p:spTree>
@@ -1994,7 +2065,7 @@
 </p:sld>
 </file>
 
-<file path=ppt/slides/slide14.xml><?xml version="1.0" encoding="utf-8"?>
+<file path=ppt/slides/slide4.xml><?xml version="1.0" encoding="utf-8"?>
 <p:sld xmlns:a="http://schemas.openxmlformats.org/drawingml/2006/main" xmlns:p="http://schemas.openxmlformats.org/presentationml/2006/main" xmlns:r="http://schemas.openxmlformats.org/officeDocument/2006/relationships">
   <p:cSld>
     <p:spTree>
@@ -2191,7 +2262,7 @@
 </p:sld>
 </file>
 
-<file path=ppt/slides/slide15.xml><?xml version="1.0" encoding="utf-8"?>
+<file path=ppt/slides/slide5.xml><?xml version="1.0" encoding="utf-8"?>
 <p:sld xmlns:a="http://schemas.openxmlformats.org/drawingml/2006/main" xmlns:p="http://schemas.openxmlformats.org/presentationml/2006/main" xmlns:r="http://schemas.openxmlformats.org/officeDocument/2006/relationships">
   <p:cSld>
     <p:spTree>
@@ -2370,7 +2441,7 @@
 </p:sld>
 </file>
 
-<file path=ppt/slides/slide16.xml><?xml version="1.0" encoding="utf-8"?>
+<file path=ppt/slides/slide6.xml><?xml version="1.0" encoding="utf-8"?>
 <p:sld xmlns:a="http://schemas.openxmlformats.org/drawingml/2006/main" xmlns:p="http://schemas.openxmlformats.org/presentationml/2006/main" xmlns:r="http://schemas.openxmlformats.org/officeDocument/2006/relationships">
   <p:cSld>
     <p:spTree>
@@ -2536,6 +2607,167 @@
             <a:fld id="{F7021451-1387-4CA6-816F-3879F97B5CBC}" type="slidenum">
               <a:rPr b="0" lang="en-US"/>
               <a:t>6</a:t>
+            </a:fld>
+            <a:endParaRPr lang="en-US"/>
+          </a:p>
+        </p:txBody>
+      </p:sp>
+    </p:spTree>
+  </p:cSld>
+  <p:clrMapOvr>
+    <a:masterClrMapping/>
+  </p:clrMapOvr>
+</p:sld>
+</file>
+
+<file path=ppt/slides/slide7.xml><?xml version="1.0" encoding="utf-8"?>
+<p:sld xmlns:a="http://schemas.openxmlformats.org/drawingml/2006/main" xmlns:p="http://schemas.openxmlformats.org/presentationml/2006/main" xmlns:r="http://schemas.openxmlformats.org/officeDocument/2006/relationships">
+  <p:cSld>
+    <p:spTree>
+      <p:nvGrpSpPr>
+        <p:cNvPr id="1" name=""/>
+        <p:cNvGrpSpPr/>
+        <p:nvPr/>
+      </p:nvGrpSpPr>
+      <p:grpSpPr/>
+      <p:sp>
+        <p:nvSpPr>
+          <p:cNvPr id="2" name="Text 0"/>
+          <p:cNvSpPr/>
+          <p:nvPr>
+            <p:ph idx="100" type="title" hasCustomPrompt="1"/>
+          </p:nvPr>
+        </p:nvSpPr>
+        <p:spPr>
+          <a:xfrm>
+            <a:off x="731520" y="457200"/>
+            <a:ext cx="10698480" cy="822960"/>
+          </a:xfrm>
+          <a:prstGeom prst="rect">
+            <a:avLst/>
+          </a:prstGeom>
+          <a:noFill/>
+          <a:ln/>
+        </p:spPr>
+        <p:txBody>
+          <a:bodyPr wrap="square" lIns="0" tIns="0" rIns="0" bIns="0" rtlCol="0" anchor="t"/>
+          <a:lstStyle/>
+          <a:p>
+            <a:pPr algn="l" indent="0" marL="0">
+              <a:buNone/>
+            </a:pPr>
+            <a:r>
+              <a:rPr lang="en-US" sz="3200" b="1" dirty="0">
+                <a:solidFill>
+                  <a:srgbClr val="FFFFFF"/>
+                </a:solidFill>
+              </a:rPr>
+              <a:t>Discussion</a:t>
+            </a:r>
+            <a:endParaRPr lang="en-US" sz="3200" dirty="0"/>
+          </a:p>
+        </p:txBody>
+      </p:sp>
+      <p:sp>
+        <p:nvSpPr>
+          <p:cNvPr id="3" name="Text 0"/>
+          <p:cNvSpPr/>
+          <p:nvPr>
+            <p:ph idx="101" type="body" hasCustomPrompt="1"/>
+          </p:nvPr>
+        </p:nvSpPr>
+        <p:spPr>
+          <a:xfrm>
+            <a:off x="731520" y="1554480"/>
+            <a:ext cx="10698480" cy="4754880"/>
+          </a:xfrm>
+          <a:prstGeom prst="rect">
+            <a:avLst/>
+          </a:prstGeom>
+          <a:noFill/>
+          <a:ln/>
+        </p:spPr>
+        <p:txBody>
+          <a:bodyPr wrap="square" rtlCol="0" anchor="t"/>
+          <a:lstStyle/>
+          <a:p>
+            <a:pPr algn="l" marL="342900" indent="-342900">
+              <a:spcAft>
+                <a:spcPts val="1000"/>
+              </a:spcAft>
+              <a:buSzPct val="100000"/>
+              <a:buChar char="•"/>
+            </a:pPr>
+            <a:r>
+              <a:rPr lang="en-US" sz="2400" dirty="0">
+                <a:solidFill>
+                  <a:srgbClr val="FFFFFF"/>
+                </a:solidFill>
+              </a:rPr>
+              <a:t>Think of a data request you've made or received. How would you restate it as a decision, and who would act on the answer?</a:t>
+            </a:r>
+            <a:endParaRPr lang="en-US" sz="2400" dirty="0"/>
+          </a:p>
+          <a:p>
+            <a:pPr algn="l" marL="342900" indent="-342900">
+              <a:spcAft>
+                <a:spcPts val="1000"/>
+              </a:spcAft>
+              <a:buSzPct val="100000"/>
+              <a:buChar char="•"/>
+            </a:pPr>
+            <a:r>
+              <a:rPr lang="en-US" sz="2400" dirty="0">
+                <a:solidFill>
+                  <a:srgbClr val="FFFFFF"/>
+                </a:solidFill>
+              </a:rPr>
+              <a:t>Draw on your own experience and career, and apply today's seminar to that setting.</a:t>
+            </a:r>
+            <a:endParaRPr lang="en-US" sz="2400" dirty="0"/>
+          </a:p>
+        </p:txBody>
+      </p:sp>
+      <p:sp>
+        <p:nvSpPr>
+          <p:cNvPr id="25" name="Slide Number Placeholder 0"/>
+          <p:cNvSpPr>
+            <a:spLocks noGrp="1"/>
+          </p:cNvSpPr>
+          <p:nvPr>
+            <p:ph type="sldNum" sz="quarter" idx="4294967295"/>
+          </p:nvPr>
+        </p:nvSpPr>
+        <p:spPr>
+          <a:xfrm>
+            <a:off x="10972800" y="6400800"/>
+            <a:ext cx="548640" cy="274320"/>
+          </a:xfrm>
+          <a:prstGeom prst="rect">
+            <a:avLst/>
+          </a:prstGeom>
+          <a:extLst>
+            <a:ext uri="{C572A759-6A51-4108-AA02-DFA0A04FC94B}">
+              <ma14:wrappingTextBoxFlag xmlns:ma14="http://schemas.microsoft.com/office/mac/drawingml/2011/main" val="0"/>
+            </a:ext>
+          </a:extLst>
+        </p:spPr>
+        <p:txBody>
+          <a:bodyPr/>
+          <a:lstStyle>
+            <a:lvl1pPr>
+              <a:defRPr sz="1000">
+                <a:solidFill>
+                  <a:srgbClr val="BFBFBF"/>
+                </a:solidFill>
+              </a:defRPr>
+            </a:lvl1pPr>
+          </a:lstStyle>
+          <a:p>
+            <a:pPr algn="r"/>
+            <a:fld id="{F7021451-1387-4CA6-816F-3879F97B5CBC}" type="slidenum">
+              <a:rPr b="0" lang="en-US"/>
+              <a:t>7</a:t>
             </a:fld>
             <a:endParaRPr lang="en-US"/>
           </a:p>

--- a/management-seminars/week02_project_components.pptx
+++ b/management-seminars/week02_project_components.pptx
@@ -1619,7 +1619,7 @@
                   <a:srgbClr val="FFFFFF"/>
                 </a:solidFill>
               </a:rPr>
-              <a:t>Components of a Data Analytics Project</a:t>
+              <a:t>Week 2: Components of a Data Analytics Project</a:t>
             </a:r>
             <a:endParaRPr lang="en-US" sz="4000" dirty="0"/>
           </a:p>
